--- a/Report and PPT/2210990008-COOP2_External_PPT.pptx
+++ b/Report and PPT/2210990008-COOP2_External_PPT.pptx
@@ -250,7 +250,7 @@
             <a:fld id="{25D2B5EB-424D-4C39-A8AB-65F1D7895EF3}" type="datetimeFigureOut">
               <a:rPr lang="en-US" smtClean="0"/>
               <a:pPr/>
-              <a:t>5/7/2026</a:t>
+              <a:t>5/15/2026</a:t>
             </a:fld>
             <a:endParaRPr lang="en-US"/>
           </a:p>
@@ -433,7 +433,7 @@
             <a:fld id="{888BC1CF-45D5-4DEE-AAB8-8C5341844FC9}" type="datetimeFigureOut">
               <a:rPr lang="en-US" smtClean="0"/>
               <a:pPr/>
-              <a:t>5/7/2026</a:t>
+              <a:t>5/15/2026</a:t>
             </a:fld>
             <a:endParaRPr lang="en-US"/>
           </a:p>
@@ -809,6 +809,113 @@
     <p:extLst>
       <p:ext uri="{BB962C8B-B14F-4D97-AF65-F5344CB8AC3E}">
         <p14:creationId xmlns:p14="http://schemas.microsoft.com/office/powerpoint/2010/main" val="4254874723"/>
+      </p:ext>
+    </p:extLst>
+  </p:cSld>
+  <p:clrMapOvr>
+    <a:masterClrMapping/>
+  </p:clrMapOvr>
+</p:notes>
+</file>
+
+<file path=ppt/notesSlides/notesSlide2.xml><?xml version="1.0" encoding="utf-8"?>
+<p:notes xmlns:a="http://schemas.openxmlformats.org/drawingml/2006/main" xmlns:r="http://schemas.openxmlformats.org/officeDocument/2006/relationships" xmlns:p="http://schemas.openxmlformats.org/presentationml/2006/main">
+  <p:cSld>
+    <p:spTree>
+      <p:nvGrpSpPr>
+        <p:cNvPr id="1" name=""/>
+        <p:cNvGrpSpPr/>
+        <p:nvPr/>
+      </p:nvGrpSpPr>
+      <p:grpSpPr>
+        <a:xfrm>
+          <a:off x="0" y="0"/>
+          <a:ext cx="0" cy="0"/>
+          <a:chOff x="0" y="0"/>
+          <a:chExt cx="0" cy="0"/>
+        </a:xfrm>
+      </p:grpSpPr>
+      <p:sp>
+        <p:nvSpPr>
+          <p:cNvPr id="2" name="Slide Image Placeholder 1"/>
+          <p:cNvSpPr>
+            <a:spLocks noGrp="1" noRot="1" noChangeAspect="1"/>
+          </p:cNvSpPr>
+          <p:nvPr>
+            <p:ph type="sldImg"/>
+          </p:nvPr>
+        </p:nvSpPr>
+        <p:spPr/>
+      </p:sp>
+      <p:sp>
+        <p:nvSpPr>
+          <p:cNvPr id="3" name="Notes Placeholder 2"/>
+          <p:cNvSpPr>
+            <a:spLocks noGrp="1"/>
+          </p:cNvSpPr>
+          <p:nvPr>
+            <p:ph type="body" idx="1"/>
+          </p:nvPr>
+        </p:nvSpPr>
+        <p:spPr/>
+        <p:txBody>
+          <a:bodyPr/>
+          <a:lstStyle/>
+          <a:p>
+            <a:endParaRPr lang="en-IN" dirty="0"/>
+          </a:p>
+        </p:txBody>
+      </p:sp>
+      <p:sp>
+        <p:nvSpPr>
+          <p:cNvPr id="4" name="Footer Placeholder 3"/>
+          <p:cNvSpPr>
+            <a:spLocks noGrp="1"/>
+          </p:cNvSpPr>
+          <p:nvPr>
+            <p:ph type="ftr" sz="quarter" idx="4"/>
+          </p:nvPr>
+        </p:nvSpPr>
+        <p:spPr/>
+        <p:txBody>
+          <a:bodyPr/>
+          <a:lstStyle/>
+          <a:p>
+            <a:r>
+              <a:rPr lang="en-US"/>
+              <a:t>Name of the faculty [Group: G00] [Sem:2nd]</a:t>
+            </a:r>
+          </a:p>
+        </p:txBody>
+      </p:sp>
+      <p:sp>
+        <p:nvSpPr>
+          <p:cNvPr id="5" name="Slide Number Placeholder 4"/>
+          <p:cNvSpPr>
+            <a:spLocks noGrp="1"/>
+          </p:cNvSpPr>
+          <p:nvPr>
+            <p:ph type="sldNum" sz="quarter" idx="5"/>
+          </p:nvPr>
+        </p:nvSpPr>
+        <p:spPr/>
+        <p:txBody>
+          <a:bodyPr/>
+          <a:lstStyle/>
+          <a:p>
+            <a:fld id="{C5A7523A-12D4-4E0F-9409-B3F845B48333}" type="slidenum">
+              <a:rPr lang="en-US" smtClean="0"/>
+              <a:pPr/>
+              <a:t>10</a:t>
+            </a:fld>
+            <a:endParaRPr lang="en-US"/>
+          </a:p>
+        </p:txBody>
+      </p:sp>
+    </p:spTree>
+    <p:extLst>
+      <p:ext uri="{BB962C8B-B14F-4D97-AF65-F5344CB8AC3E}">
+        <p14:creationId xmlns:p14="http://schemas.microsoft.com/office/powerpoint/2010/main" val="746507899"/>
       </p:ext>
     </p:extLst>
   </p:cSld>
@@ -3846,16 +3953,18 @@
         </p:nvSpPr>
         <p:spPr>
           <a:xfrm>
-            <a:off x="457200" y="1151791"/>
-            <a:ext cx="8229240" cy="4870939"/>
+            <a:off x="114300" y="914040"/>
+            <a:ext cx="8572140" cy="5073522"/>
           </a:xfrm>
         </p:spPr>
         <p:txBody>
           <a:bodyPr/>
           <a:lstStyle/>
           <a:p>
-            <a:pPr marL="0" indent="0">
-              <a:buNone/>
+            <a:pPr>
+              <a:lnSpc>
+                <a:spcPct val="150000"/>
+              </a:lnSpc>
             </a:pPr>
             <a:r>
               <a:rPr lang="en-IN" sz="2200" b="1" dirty="0">
@@ -3866,6 +3975,13 @@
             </a:r>
           </a:p>
           <a:p>
+            <a:pPr marL="342900" indent="-342900">
+              <a:lnSpc>
+                <a:spcPct val="150000"/>
+              </a:lnSpc>
+              <a:buFont typeface="Arial" panose="020B0604020202020204" pitchFamily="34" charset="0"/>
+              <a:buChar char="•"/>
+            </a:pPr>
             <a:r>
               <a:rPr lang="en-IN" sz="2200" dirty="0">
                 <a:latin typeface="Times New Roman" panose="02020603050405020304" pitchFamily="18" charset="0"/>
@@ -3875,8 +3991,10 @@
             </a:r>
           </a:p>
           <a:p>
-            <a:pPr marL="0" indent="0">
-              <a:buNone/>
+            <a:pPr>
+              <a:lnSpc>
+                <a:spcPct val="150000"/>
+              </a:lnSpc>
             </a:pPr>
             <a:r>
               <a:rPr lang="en-IN" sz="2200" b="1" dirty="0">
@@ -3887,6 +4005,13 @@
             </a:r>
           </a:p>
           <a:p>
+            <a:pPr marL="342900" indent="-342900">
+              <a:lnSpc>
+                <a:spcPct val="150000"/>
+              </a:lnSpc>
+              <a:buFont typeface="Arial" panose="020B0604020202020204" pitchFamily="34" charset="0"/>
+              <a:buChar char="•"/>
+            </a:pPr>
             <a:r>
               <a:rPr lang="en-IN" sz="2200" dirty="0">
                 <a:latin typeface="Times New Roman" panose="02020603050405020304" pitchFamily="18" charset="0"/>
@@ -3896,6 +4021,13 @@
             </a:r>
           </a:p>
           <a:p>
+            <a:pPr marL="342900" indent="-342900">
+              <a:lnSpc>
+                <a:spcPct val="150000"/>
+              </a:lnSpc>
+              <a:buFont typeface="Arial" panose="020B0604020202020204" pitchFamily="34" charset="0"/>
+              <a:buChar char="•"/>
+            </a:pPr>
             <a:r>
               <a:rPr lang="en-IN" sz="2200" dirty="0">
                 <a:latin typeface="Times New Roman" panose="02020603050405020304" pitchFamily="18" charset="0"/>
@@ -3905,8 +4037,10 @@
             </a:r>
           </a:p>
           <a:p>
-            <a:pPr marL="0" indent="0">
-              <a:buNone/>
+            <a:pPr>
+              <a:lnSpc>
+                <a:spcPct val="150000"/>
+              </a:lnSpc>
             </a:pPr>
             <a:r>
               <a:rPr lang="en-IN" sz="2200" b="1" dirty="0">
@@ -3917,6 +4051,13 @@
             </a:r>
           </a:p>
           <a:p>
+            <a:pPr marL="342900" indent="-342900">
+              <a:lnSpc>
+                <a:spcPct val="150000"/>
+              </a:lnSpc>
+              <a:buFont typeface="Arial" panose="020B0604020202020204" pitchFamily="34" charset="0"/>
+              <a:buChar char="•"/>
+            </a:pPr>
             <a:r>
               <a:rPr lang="en-IN" sz="2200" dirty="0">
                 <a:latin typeface="Times New Roman" panose="02020603050405020304" pitchFamily="18" charset="0"/>
@@ -3926,8 +4067,10 @@
             </a:r>
           </a:p>
           <a:p>
-            <a:pPr marL="0" indent="0">
-              <a:buNone/>
+            <a:pPr>
+              <a:lnSpc>
+                <a:spcPct val="150000"/>
+              </a:lnSpc>
             </a:pPr>
             <a:r>
               <a:rPr lang="en-IN" sz="2200" b="1" dirty="0">
@@ -3938,6 +4081,13 @@
             </a:r>
           </a:p>
           <a:p>
+            <a:pPr marL="342900" indent="-342900">
+              <a:lnSpc>
+                <a:spcPct val="150000"/>
+              </a:lnSpc>
+              <a:buFont typeface="Arial" panose="020B0604020202020204" pitchFamily="34" charset="0"/>
+              <a:buChar char="•"/>
+            </a:pPr>
             <a:r>
               <a:rPr lang="en-IN" sz="2200" dirty="0">
                 <a:latin typeface="Times New Roman" panose="02020603050405020304" pitchFamily="18" charset="0"/>
@@ -3969,7 +4119,7 @@
           <p:nvPr/>
         </p:nvPicPr>
         <p:blipFill>
-          <a:blip r:embed="rId2" cstate="print">
+          <a:blip r:embed="rId3" cstate="print">
             <a:extLst>
               <a:ext uri="{28A0092B-C50C-407E-A947-70E740481C1C}">
                 <a14:useLocalDpi xmlns:a14="http://schemas.microsoft.com/office/drawing/2010/main" val="0"/>
@@ -3982,7 +4132,7 @@
         </p:blipFill>
         <p:spPr>
           <a:xfrm>
-            <a:off x="228510" y="5663917"/>
+            <a:off x="228690" y="6068363"/>
             <a:ext cx="8686620" cy="358813"/>
           </a:xfrm>
           <a:prstGeom prst="rect">
@@ -4734,18 +4884,15 @@
         <p:spPr>
           <a:xfrm>
             <a:off x="105508" y="826477"/>
-            <a:ext cx="8580932" cy="5407269"/>
+            <a:ext cx="8580932" cy="4703885"/>
           </a:xfrm>
         </p:spPr>
         <p:txBody>
           <a:bodyPr/>
           <a:lstStyle/>
           <a:p>
-            <a:pPr marL="0" indent="0">
-              <a:buNone/>
-            </a:pPr>
-            <a:r>
-              <a:rPr lang="en-IN" sz="1800" b="1" dirty="0">
+            <a:r>
+              <a:rPr lang="en-IN" sz="2000" b="1" dirty="0">
                 <a:latin typeface="Times New Roman" panose="02020603050405020304" pitchFamily="18" charset="0"/>
                 <a:cs typeface="Times New Roman" panose="02020603050405020304" pitchFamily="18" charset="0"/>
               </a:rPr>
@@ -4753,17 +4900,12 @@
             </a:r>
           </a:p>
           <a:p>
-            <a:pPr marL="0" indent="0">
-              <a:buNone/>
-            </a:pPr>
-            <a:br>
-              <a:rPr lang="en-IN" sz="1800" b="1" dirty="0">
-                <a:latin typeface="Times New Roman" panose="02020603050405020304" pitchFamily="18" charset="0"/>
-                <a:cs typeface="Times New Roman" panose="02020603050405020304" pitchFamily="18" charset="0"/>
-              </a:rPr>
-            </a:br>
-            <a:r>
-              <a:rPr lang="en-IN" sz="1800" dirty="0">
+            <a:pPr marL="342900" indent="-342900">
+              <a:buFont typeface="Arial" panose="020B0604020202020204" pitchFamily="34" charset="0"/>
+              <a:buChar char="•"/>
+            </a:pPr>
+            <a:r>
+              <a:rPr lang="en-IN" sz="2000" dirty="0">
                 <a:latin typeface="Times New Roman" panose="02020603050405020304" pitchFamily="18" charset="0"/>
                 <a:cs typeface="Times New Roman" panose="02020603050405020304" pitchFamily="18" charset="0"/>
               </a:rPr>
@@ -4771,11 +4913,12 @@
             </a:r>
           </a:p>
           <a:p>
-            <a:pPr marL="0" indent="0">
-              <a:buNone/>
-            </a:pPr>
-            <a:r>
-              <a:rPr lang="en-IN" sz="1800" dirty="0">
+            <a:pPr marL="285750" indent="-285750">
+              <a:buFont typeface="Arial" panose="020B0604020202020204" pitchFamily="34" charset="0"/>
+              <a:buChar char="•"/>
+            </a:pPr>
+            <a:r>
+              <a:rPr lang="en-IN" sz="2000" dirty="0">
                 <a:latin typeface="Times New Roman" panose="02020603050405020304" pitchFamily="18" charset="0"/>
                 <a:cs typeface="Times New Roman" panose="02020603050405020304" pitchFamily="18" charset="0"/>
               </a:rPr>
@@ -4783,11 +4926,14 @@
             </a:r>
           </a:p>
           <a:p>
-            <a:pPr marL="0" indent="0">
-              <a:buNone/>
-            </a:pPr>
-            <a:r>
-              <a:rPr lang="en-IN" sz="1800" b="1" dirty="0">
+            <a:endParaRPr lang="en-IN" sz="2000" dirty="0">
+              <a:latin typeface="Times New Roman" panose="02020603050405020304" pitchFamily="18" charset="0"/>
+              <a:cs typeface="Times New Roman" panose="02020603050405020304" pitchFamily="18" charset="0"/>
+            </a:endParaRPr>
+          </a:p>
+          <a:p>
+            <a:r>
+              <a:rPr lang="en-IN" sz="2000" b="1" dirty="0">
                 <a:latin typeface="Times New Roman" panose="02020603050405020304" pitchFamily="18" charset="0"/>
                 <a:cs typeface="Times New Roman" panose="02020603050405020304" pitchFamily="18" charset="0"/>
               </a:rPr>
@@ -4795,8 +4941,12 @@
             </a:r>
           </a:p>
           <a:p>
-            <a:r>
-              <a:rPr lang="en-US" sz="1800" dirty="0">
+            <a:pPr marL="285750" indent="-285750">
+              <a:buFont typeface="Arial" panose="020B0604020202020204" pitchFamily="34" charset="0"/>
+              <a:buChar char="•"/>
+            </a:pPr>
+            <a:r>
+              <a:rPr lang="en-US" sz="2000" dirty="0">
                 <a:latin typeface="Times New Roman" panose="02020603050405020304" pitchFamily="18" charset="0"/>
                 <a:cs typeface="Times New Roman" panose="02020603050405020304" pitchFamily="18" charset="0"/>
               </a:rPr>
@@ -4804,8 +4954,12 @@
             </a:r>
           </a:p>
           <a:p>
-            <a:r>
-              <a:rPr lang="en-US" sz="1800" dirty="0">
+            <a:pPr marL="285750" indent="-285750">
+              <a:buFont typeface="Arial" panose="020B0604020202020204" pitchFamily="34" charset="0"/>
+              <a:buChar char="•"/>
+            </a:pPr>
+            <a:r>
+              <a:rPr lang="en-US" sz="2000" dirty="0">
                 <a:latin typeface="Times New Roman" panose="02020603050405020304" pitchFamily="18" charset="0"/>
                 <a:cs typeface="Times New Roman" panose="02020603050405020304" pitchFamily="18" charset="0"/>
               </a:rPr>
@@ -4813,8 +4967,12 @@
             </a:r>
           </a:p>
           <a:p>
-            <a:r>
-              <a:rPr lang="en-US" sz="1800" dirty="0">
+            <a:pPr marL="285750" indent="-285750">
+              <a:buFont typeface="Arial" panose="020B0604020202020204" pitchFamily="34" charset="0"/>
+              <a:buChar char="•"/>
+            </a:pPr>
+            <a:r>
+              <a:rPr lang="en-US" sz="2000" dirty="0">
                 <a:latin typeface="Times New Roman" panose="02020603050405020304" pitchFamily="18" charset="0"/>
                 <a:cs typeface="Times New Roman" panose="02020603050405020304" pitchFamily="18" charset="0"/>
               </a:rPr>
@@ -5015,16 +5173,18 @@
         </p:nvSpPr>
         <p:spPr>
           <a:xfrm>
-            <a:off x="79130" y="1055077"/>
-            <a:ext cx="8607309" cy="5292969"/>
+            <a:off x="79130" y="914040"/>
+            <a:ext cx="8607309" cy="6049467"/>
           </a:xfrm>
         </p:spPr>
         <p:txBody>
           <a:bodyPr/>
           <a:lstStyle/>
           <a:p>
-            <a:pPr marL="0" indent="0">
-              <a:buNone/>
+            <a:pPr>
+              <a:lnSpc>
+                <a:spcPct val="150000"/>
+              </a:lnSpc>
             </a:pPr>
             <a:r>
               <a:rPr lang="en-US" sz="2200" b="1" dirty="0">
@@ -5035,6 +5195,13 @@
             </a:r>
           </a:p>
           <a:p>
+            <a:pPr marL="342900" indent="-342900">
+              <a:lnSpc>
+                <a:spcPct val="150000"/>
+              </a:lnSpc>
+              <a:buFont typeface="Arial" panose="020B0604020202020204" pitchFamily="34" charset="0"/>
+              <a:buChar char="•"/>
+            </a:pPr>
             <a:r>
               <a:rPr lang="en-US" sz="2200" dirty="0">
                 <a:latin typeface="Times New Roman" panose="02020603050405020304" pitchFamily="18" charset="0"/>
@@ -5044,6 +5211,13 @@
             </a:r>
           </a:p>
           <a:p>
+            <a:pPr marL="342900" indent="-342900">
+              <a:lnSpc>
+                <a:spcPct val="150000"/>
+              </a:lnSpc>
+              <a:buFont typeface="Arial" panose="020B0604020202020204" pitchFamily="34" charset="0"/>
+              <a:buChar char="•"/>
+            </a:pPr>
             <a:r>
               <a:rPr lang="en-US" sz="2200" dirty="0">
                 <a:latin typeface="Times New Roman" panose="02020603050405020304" pitchFamily="18" charset="0"/>
@@ -5053,6 +5227,13 @@
             </a:r>
           </a:p>
           <a:p>
+            <a:pPr marL="342900" indent="-342900">
+              <a:lnSpc>
+                <a:spcPct val="150000"/>
+              </a:lnSpc>
+              <a:buFont typeface="Arial" panose="020B0604020202020204" pitchFamily="34" charset="0"/>
+              <a:buChar char="•"/>
+            </a:pPr>
             <a:r>
               <a:rPr lang="en-US" sz="2200" dirty="0">
                 <a:latin typeface="Times New Roman" panose="02020603050405020304" pitchFamily="18" charset="0"/>
@@ -5062,6 +5243,13 @@
             </a:r>
           </a:p>
           <a:p>
+            <a:pPr marL="342900" indent="-342900">
+              <a:lnSpc>
+                <a:spcPct val="150000"/>
+              </a:lnSpc>
+              <a:buFont typeface="Arial" panose="020B0604020202020204" pitchFamily="34" charset="0"/>
+              <a:buChar char="•"/>
+            </a:pPr>
             <a:r>
               <a:rPr lang="en-US" sz="2200" dirty="0">
                 <a:latin typeface="Times New Roman" panose="02020603050405020304" pitchFamily="18" charset="0"/>
@@ -5071,14 +5259,23 @@
             </a:r>
           </a:p>
           <a:p>
+            <a:pPr marL="342900" indent="-342900">
+              <a:lnSpc>
+                <a:spcPct val="150000"/>
+              </a:lnSpc>
+              <a:buFont typeface="Arial" panose="020B0604020202020204" pitchFamily="34" charset="0"/>
+              <a:buChar char="•"/>
+            </a:pPr>
             <a:endParaRPr lang="en-US" sz="2200" dirty="0">
               <a:latin typeface="Times New Roman" panose="02020603050405020304" pitchFamily="18" charset="0"/>
               <a:cs typeface="Times New Roman" panose="02020603050405020304" pitchFamily="18" charset="0"/>
             </a:endParaRPr>
           </a:p>
           <a:p>
-            <a:pPr marL="0" indent="0">
-              <a:buNone/>
+            <a:pPr>
+              <a:lnSpc>
+                <a:spcPct val="150000"/>
+              </a:lnSpc>
             </a:pPr>
             <a:r>
               <a:rPr lang="en-US" sz="2200" b="1" dirty="0">
@@ -5089,6 +5286,13 @@
             </a:r>
           </a:p>
           <a:p>
+            <a:pPr marL="342900" indent="-342900">
+              <a:lnSpc>
+                <a:spcPct val="150000"/>
+              </a:lnSpc>
+              <a:buFont typeface="Arial" panose="020B0604020202020204" pitchFamily="34" charset="0"/>
+              <a:buChar char="•"/>
+            </a:pPr>
             <a:r>
               <a:rPr lang="en-US" sz="2200" dirty="0">
                 <a:latin typeface="Times New Roman" panose="02020603050405020304" pitchFamily="18" charset="0"/>
@@ -5098,6 +5302,13 @@
             </a:r>
           </a:p>
           <a:p>
+            <a:pPr marL="342900" indent="-342900">
+              <a:lnSpc>
+                <a:spcPct val="150000"/>
+              </a:lnSpc>
+              <a:buFont typeface="Arial" panose="020B0604020202020204" pitchFamily="34" charset="0"/>
+              <a:buChar char="•"/>
+            </a:pPr>
             <a:r>
               <a:rPr lang="en-US" sz="2200" dirty="0">
                 <a:latin typeface="Times New Roman" panose="02020603050405020304" pitchFamily="18" charset="0"/>
@@ -5107,6 +5318,13 @@
             </a:r>
           </a:p>
           <a:p>
+            <a:pPr marL="342900" indent="-342900">
+              <a:lnSpc>
+                <a:spcPct val="150000"/>
+              </a:lnSpc>
+              <a:buFont typeface="Arial" panose="020B0604020202020204" pitchFamily="34" charset="0"/>
+              <a:buChar char="•"/>
+            </a:pPr>
             <a:r>
               <a:rPr lang="en-US" sz="2200" dirty="0">
                 <a:latin typeface="Times New Roman" panose="02020603050405020304" pitchFamily="18" charset="0"/>
@@ -5116,6 +5334,13 @@
             </a:r>
           </a:p>
           <a:p>
+            <a:pPr marL="342900" indent="-342900">
+              <a:lnSpc>
+                <a:spcPct val="150000"/>
+              </a:lnSpc>
+              <a:buFont typeface="Arial" panose="020B0604020202020204" pitchFamily="34" charset="0"/>
+              <a:buChar char="•"/>
+            </a:pPr>
             <a:r>
               <a:rPr lang="en-US" sz="2200" dirty="0">
                 <a:latin typeface="Times New Roman" panose="02020603050405020304" pitchFamily="18" charset="0"/>
@@ -5125,6 +5350,13 @@
             </a:r>
           </a:p>
           <a:p>
+            <a:pPr marL="342900" indent="-342900">
+              <a:lnSpc>
+                <a:spcPct val="150000"/>
+              </a:lnSpc>
+              <a:buFont typeface="Arial" panose="020B0604020202020204" pitchFamily="34" charset="0"/>
+              <a:buChar char="•"/>
+            </a:pPr>
             <a:endParaRPr lang="en-IN" sz="2200" dirty="0">
               <a:latin typeface="Times New Roman" panose="02020603050405020304" pitchFamily="18" charset="0"/>
               <a:cs typeface="Times New Roman" panose="02020603050405020304" pitchFamily="18" charset="0"/>
@@ -5212,14 +5444,21 @@
         </p:nvSpPr>
         <p:spPr>
           <a:xfrm>
-            <a:off x="457200" y="-1134208"/>
-            <a:ext cx="8229240" cy="6716008"/>
+            <a:off x="457200" y="-1134209"/>
+            <a:ext cx="8229240" cy="7552593"/>
           </a:xfrm>
         </p:spPr>
         <p:txBody>
           <a:bodyPr/>
           <a:lstStyle/>
           <a:p>
+            <a:pPr marL="342900" indent="-342900">
+              <a:lnSpc>
+                <a:spcPct val="200000"/>
+              </a:lnSpc>
+              <a:buFont typeface="Arial" panose="020B0604020202020204" pitchFamily="34" charset="0"/>
+              <a:buChar char="•"/>
+            </a:pPr>
             <a:r>
               <a:rPr lang="en-US" sz="2200" dirty="0">
                 <a:latin typeface="Times New Roman" panose="02020603050405020304" pitchFamily="18" charset="0"/>
@@ -5229,6 +5468,13 @@
             </a:r>
           </a:p>
           <a:p>
+            <a:pPr marL="342900" indent="-342900">
+              <a:lnSpc>
+                <a:spcPct val="200000"/>
+              </a:lnSpc>
+              <a:buFont typeface="Arial" panose="020B0604020202020204" pitchFamily="34" charset="0"/>
+              <a:buChar char="•"/>
+            </a:pPr>
             <a:r>
               <a:rPr lang="en-US" sz="2200" dirty="0">
                 <a:latin typeface="Times New Roman" panose="02020603050405020304" pitchFamily="18" charset="0"/>
@@ -5238,6 +5484,13 @@
             </a:r>
           </a:p>
           <a:p>
+            <a:pPr marL="342900" indent="-342900">
+              <a:lnSpc>
+                <a:spcPct val="200000"/>
+              </a:lnSpc>
+              <a:buFont typeface="Arial" panose="020B0604020202020204" pitchFamily="34" charset="0"/>
+              <a:buChar char="•"/>
+            </a:pPr>
             <a:r>
               <a:rPr lang="en-US" sz="2200" dirty="0">
                 <a:latin typeface="Times New Roman" panose="02020603050405020304" pitchFamily="18" charset="0"/>
@@ -5247,6 +5500,13 @@
             </a:r>
           </a:p>
           <a:p>
+            <a:pPr marL="342900" indent="-342900">
+              <a:lnSpc>
+                <a:spcPct val="200000"/>
+              </a:lnSpc>
+              <a:buFont typeface="Arial" panose="020B0604020202020204" pitchFamily="34" charset="0"/>
+              <a:buChar char="•"/>
+            </a:pPr>
             <a:r>
               <a:rPr lang="en-US" sz="2200" dirty="0">
                 <a:latin typeface="Times New Roman" panose="02020603050405020304" pitchFamily="18" charset="0"/>
@@ -5256,6 +5516,13 @@
             </a:r>
           </a:p>
           <a:p>
+            <a:pPr marL="342900" indent="-342900">
+              <a:lnSpc>
+                <a:spcPct val="200000"/>
+              </a:lnSpc>
+              <a:buFont typeface="Arial" panose="020B0604020202020204" pitchFamily="34" charset="0"/>
+              <a:buChar char="•"/>
+            </a:pPr>
             <a:r>
               <a:rPr lang="en-US" sz="2200" dirty="0">
                 <a:latin typeface="Times New Roman" panose="02020603050405020304" pitchFamily="18" charset="0"/>
@@ -5805,14 +6072,21 @@
         </p:nvSpPr>
         <p:spPr>
           <a:xfrm>
-            <a:off x="457200" y="914040"/>
-            <a:ext cx="8229240" cy="5548306"/>
+            <a:off x="114300" y="79131"/>
+            <a:ext cx="8572140" cy="6383215"/>
           </a:xfrm>
         </p:spPr>
         <p:txBody>
           <a:bodyPr/>
           <a:lstStyle/>
           <a:p>
+            <a:pPr marL="342900" indent="-342900">
+              <a:lnSpc>
+                <a:spcPct val="150000"/>
+              </a:lnSpc>
+              <a:buFont typeface="Arial" panose="020B0604020202020204" pitchFamily="34" charset="0"/>
+              <a:buChar char="•"/>
+            </a:pPr>
             <a:r>
               <a:rPr lang="en-US" sz="2200" dirty="0">
                 <a:latin typeface="Times New Roman" panose="02020603050405020304" pitchFamily="18" charset="0"/>
@@ -5822,6 +6096,13 @@
             </a:r>
           </a:p>
           <a:p>
+            <a:pPr marL="342900" indent="-342900">
+              <a:lnSpc>
+                <a:spcPct val="150000"/>
+              </a:lnSpc>
+              <a:buFont typeface="Arial" panose="020B0604020202020204" pitchFamily="34" charset="0"/>
+              <a:buChar char="•"/>
+            </a:pPr>
             <a:r>
               <a:rPr lang="en-US" sz="2200" dirty="0">
                 <a:latin typeface="Times New Roman" panose="02020603050405020304" pitchFamily="18" charset="0"/>
@@ -5831,6 +6112,13 @@
             </a:r>
           </a:p>
           <a:p>
+            <a:pPr marL="342900" indent="-342900">
+              <a:lnSpc>
+                <a:spcPct val="150000"/>
+              </a:lnSpc>
+              <a:buFont typeface="Arial" panose="020B0604020202020204" pitchFamily="34" charset="0"/>
+              <a:buChar char="•"/>
+            </a:pPr>
             <a:r>
               <a:rPr lang="en-US" sz="2200" dirty="0">
                 <a:latin typeface="Times New Roman" panose="02020603050405020304" pitchFamily="18" charset="0"/>
@@ -5840,6 +6128,13 @@
             </a:r>
           </a:p>
           <a:p>
+            <a:pPr marL="342900" indent="-342900">
+              <a:lnSpc>
+                <a:spcPct val="150000"/>
+              </a:lnSpc>
+              <a:buFont typeface="Arial" panose="020B0604020202020204" pitchFamily="34" charset="0"/>
+              <a:buChar char="•"/>
+            </a:pPr>
             <a:r>
               <a:rPr lang="en-US" sz="2200" dirty="0">
                 <a:latin typeface="Times New Roman" panose="02020603050405020304" pitchFamily="18" charset="0"/>
@@ -5849,6 +6144,13 @@
             </a:r>
           </a:p>
           <a:p>
+            <a:pPr marL="342900" indent="-342900">
+              <a:lnSpc>
+                <a:spcPct val="150000"/>
+              </a:lnSpc>
+              <a:buFont typeface="Arial" panose="020B0604020202020204" pitchFamily="34" charset="0"/>
+              <a:buChar char="•"/>
+            </a:pPr>
             <a:r>
               <a:rPr lang="en-US" sz="2200" dirty="0">
                 <a:latin typeface="Times New Roman" panose="02020603050405020304" pitchFamily="18" charset="0"/>
@@ -5858,6 +6160,13 @@
             </a:r>
           </a:p>
           <a:p>
+            <a:pPr marL="342900" indent="-342900">
+              <a:lnSpc>
+                <a:spcPct val="150000"/>
+              </a:lnSpc>
+              <a:buFont typeface="Arial" panose="020B0604020202020204" pitchFamily="34" charset="0"/>
+              <a:buChar char="•"/>
+            </a:pPr>
             <a:r>
               <a:rPr lang="en-US" sz="2200" dirty="0">
                 <a:latin typeface="Times New Roman" panose="02020603050405020304" pitchFamily="18" charset="0"/>
@@ -5867,6 +6176,13 @@
             </a:r>
           </a:p>
           <a:p>
+            <a:pPr marL="342900" indent="-342900">
+              <a:lnSpc>
+                <a:spcPct val="150000"/>
+              </a:lnSpc>
+              <a:buFont typeface="Arial" panose="020B0604020202020204" pitchFamily="34" charset="0"/>
+              <a:buChar char="•"/>
+            </a:pPr>
             <a:r>
               <a:rPr lang="en-US" sz="2200" dirty="0">
                 <a:latin typeface="Times New Roman" panose="02020603050405020304" pitchFamily="18" charset="0"/>
@@ -5991,16 +6307,18 @@
         </p:nvSpPr>
         <p:spPr>
           <a:xfrm>
-            <a:off x="457200" y="668215"/>
-            <a:ext cx="8229240" cy="5495193"/>
+            <a:off x="70338" y="668215"/>
+            <a:ext cx="8616102" cy="5495193"/>
           </a:xfrm>
         </p:spPr>
         <p:txBody>
           <a:bodyPr/>
           <a:lstStyle/>
           <a:p>
-            <a:pPr marL="0" indent="0">
-              <a:buNone/>
+            <a:pPr>
+              <a:lnSpc>
+                <a:spcPct val="150000"/>
+              </a:lnSpc>
             </a:pPr>
             <a:r>
               <a:rPr lang="en-US" sz="2200" b="1" dirty="0">
@@ -6011,6 +6329,13 @@
             </a:r>
           </a:p>
           <a:p>
+            <a:pPr marL="342900" indent="-342900">
+              <a:lnSpc>
+                <a:spcPct val="150000"/>
+              </a:lnSpc>
+              <a:buFont typeface="Arial" panose="020B0604020202020204" pitchFamily="34" charset="0"/>
+              <a:buChar char="•"/>
+            </a:pPr>
             <a:r>
               <a:rPr lang="en-US" sz="2200" dirty="0">
                 <a:latin typeface="Times New Roman" panose="02020603050405020304" pitchFamily="18" charset="0"/>
@@ -6020,6 +6345,13 @@
             </a:r>
           </a:p>
           <a:p>
+            <a:pPr marL="342900" indent="-342900">
+              <a:lnSpc>
+                <a:spcPct val="150000"/>
+              </a:lnSpc>
+              <a:buFont typeface="Arial" panose="020B0604020202020204" pitchFamily="34" charset="0"/>
+              <a:buChar char="•"/>
+            </a:pPr>
             <a:r>
               <a:rPr lang="en-US" sz="2200" dirty="0">
                 <a:latin typeface="Times New Roman" panose="02020603050405020304" pitchFamily="18" charset="0"/>
@@ -6029,6 +6361,13 @@
             </a:r>
           </a:p>
           <a:p>
+            <a:pPr marL="342900" indent="-342900">
+              <a:lnSpc>
+                <a:spcPct val="150000"/>
+              </a:lnSpc>
+              <a:buFont typeface="Arial" panose="020B0604020202020204" pitchFamily="34" charset="0"/>
+              <a:buChar char="•"/>
+            </a:pPr>
             <a:r>
               <a:rPr lang="en-US" sz="2200" dirty="0">
                 <a:latin typeface="Times New Roman" panose="02020603050405020304" pitchFamily="18" charset="0"/>
@@ -6038,8 +6377,12 @@
             </a:r>
           </a:p>
           <a:p>
-            <a:pPr marL="0" indent="0">
-              <a:buNone/>
+            <a:pPr marL="342900" indent="-342900">
+              <a:lnSpc>
+                <a:spcPct val="150000"/>
+              </a:lnSpc>
+              <a:buFont typeface="Arial" panose="020B0604020202020204" pitchFamily="34" charset="0"/>
+              <a:buChar char="•"/>
             </a:pPr>
             <a:endParaRPr lang="en-US" sz="2200" dirty="0">
               <a:latin typeface="Times New Roman" panose="02020603050405020304" pitchFamily="18" charset="0"/>
@@ -6047,8 +6390,10 @@
             </a:endParaRPr>
           </a:p>
           <a:p>
-            <a:pPr marL="0" indent="0">
-              <a:buNone/>
+            <a:pPr>
+              <a:lnSpc>
+                <a:spcPct val="150000"/>
+              </a:lnSpc>
             </a:pPr>
             <a:r>
               <a:rPr lang="en-US" sz="2200" b="1" dirty="0">
@@ -6059,6 +6404,13 @@
             </a:r>
           </a:p>
           <a:p>
+            <a:pPr marL="342900" indent="-342900">
+              <a:lnSpc>
+                <a:spcPct val="150000"/>
+              </a:lnSpc>
+              <a:buFont typeface="Arial" panose="020B0604020202020204" pitchFamily="34" charset="0"/>
+              <a:buChar char="•"/>
+            </a:pPr>
             <a:r>
               <a:rPr lang="en-US" sz="2200" dirty="0">
                 <a:latin typeface="Times New Roman" panose="02020603050405020304" pitchFamily="18" charset="0"/>
@@ -6068,6 +6420,13 @@
             </a:r>
           </a:p>
           <a:p>
+            <a:pPr marL="342900" indent="-342900">
+              <a:lnSpc>
+                <a:spcPct val="150000"/>
+              </a:lnSpc>
+              <a:buFont typeface="Arial" panose="020B0604020202020204" pitchFamily="34" charset="0"/>
+              <a:buChar char="•"/>
+            </a:pPr>
             <a:r>
               <a:rPr lang="en-US" sz="2200" dirty="0">
                 <a:latin typeface="Times New Roman" panose="02020603050405020304" pitchFamily="18" charset="0"/>
@@ -6077,6 +6436,13 @@
             </a:r>
           </a:p>
           <a:p>
+            <a:pPr marL="342900" indent="-342900">
+              <a:lnSpc>
+                <a:spcPct val="150000"/>
+              </a:lnSpc>
+              <a:buFont typeface="Arial" panose="020B0604020202020204" pitchFamily="34" charset="0"/>
+              <a:buChar char="•"/>
+            </a:pPr>
             <a:r>
               <a:rPr lang="en-US" sz="2200" dirty="0">
                 <a:latin typeface="Times New Roman" panose="02020603050405020304" pitchFamily="18" charset="0"/>
@@ -6086,6 +6452,13 @@
             </a:r>
           </a:p>
           <a:p>
+            <a:pPr marL="342900" indent="-342900">
+              <a:lnSpc>
+                <a:spcPct val="150000"/>
+              </a:lnSpc>
+              <a:buFont typeface="Arial" panose="020B0604020202020204" pitchFamily="34" charset="0"/>
+              <a:buChar char="•"/>
+            </a:pPr>
             <a:endParaRPr lang="en-IN" sz="2200" dirty="0">
               <a:latin typeface="Times New Roman" panose="02020603050405020304" pitchFamily="18" charset="0"/>
               <a:cs typeface="Times New Roman" panose="02020603050405020304" pitchFamily="18" charset="0"/>
@@ -6173,16 +6546,18 @@
         </p:nvSpPr>
         <p:spPr>
           <a:xfrm>
-            <a:off x="457200" y="518746"/>
-            <a:ext cx="8229240" cy="6339253"/>
+            <a:off x="123092" y="914040"/>
+            <a:ext cx="8563348" cy="5943959"/>
           </a:xfrm>
         </p:spPr>
         <p:txBody>
           <a:bodyPr/>
           <a:lstStyle/>
           <a:p>
-            <a:pPr marL="0" indent="0">
-              <a:buNone/>
+            <a:pPr>
+              <a:lnSpc>
+                <a:spcPct val="150000"/>
+              </a:lnSpc>
             </a:pPr>
             <a:r>
               <a:rPr lang="en-IN" sz="2200" b="1" dirty="0">
@@ -6193,6 +6568,13 @@
             </a:r>
           </a:p>
           <a:p>
+            <a:pPr marL="342900" indent="-342900">
+              <a:lnSpc>
+                <a:spcPct val="150000"/>
+              </a:lnSpc>
+              <a:buFont typeface="Arial" panose="020B0604020202020204" pitchFamily="34" charset="0"/>
+              <a:buChar char="•"/>
+            </a:pPr>
             <a:r>
               <a:rPr lang="en-IN" sz="2200" dirty="0">
                 <a:latin typeface="Times New Roman" panose="02020603050405020304" pitchFamily="18" charset="0"/>
@@ -6202,6 +6584,13 @@
             </a:r>
           </a:p>
           <a:p>
+            <a:pPr marL="342900" indent="-342900">
+              <a:lnSpc>
+                <a:spcPct val="150000"/>
+              </a:lnSpc>
+              <a:buFont typeface="Arial" panose="020B0604020202020204" pitchFamily="34" charset="0"/>
+              <a:buChar char="•"/>
+            </a:pPr>
             <a:r>
               <a:rPr lang="en-IN" sz="2200" dirty="0">
                 <a:latin typeface="Times New Roman" panose="02020603050405020304" pitchFamily="18" charset="0"/>
@@ -6211,6 +6600,13 @@
             </a:r>
           </a:p>
           <a:p>
+            <a:pPr marL="342900" indent="-342900">
+              <a:lnSpc>
+                <a:spcPct val="150000"/>
+              </a:lnSpc>
+              <a:buFont typeface="Arial" panose="020B0604020202020204" pitchFamily="34" charset="0"/>
+              <a:buChar char="•"/>
+            </a:pPr>
             <a:r>
               <a:rPr lang="en-IN" sz="2200" dirty="0">
                 <a:latin typeface="Times New Roman" panose="02020603050405020304" pitchFamily="18" charset="0"/>
@@ -6220,6 +6616,13 @@
             </a:r>
           </a:p>
           <a:p>
+            <a:pPr marL="342900" indent="-342900">
+              <a:lnSpc>
+                <a:spcPct val="150000"/>
+              </a:lnSpc>
+              <a:buFont typeface="Arial" panose="020B0604020202020204" pitchFamily="34" charset="0"/>
+              <a:buChar char="•"/>
+            </a:pPr>
             <a:r>
               <a:rPr lang="en-IN" sz="2200" dirty="0">
                 <a:latin typeface="Times New Roman" panose="02020603050405020304" pitchFamily="18" charset="0"/>
@@ -6229,6 +6632,13 @@
             </a:r>
           </a:p>
           <a:p>
+            <a:pPr marL="342900" indent="-342900">
+              <a:lnSpc>
+                <a:spcPct val="150000"/>
+              </a:lnSpc>
+              <a:buFont typeface="Arial" panose="020B0604020202020204" pitchFamily="34" charset="0"/>
+              <a:buChar char="•"/>
+            </a:pPr>
             <a:r>
               <a:rPr lang="en-IN" sz="2200" dirty="0">
                 <a:latin typeface="Times New Roman" panose="02020603050405020304" pitchFamily="18" charset="0"/>
@@ -6238,8 +6648,10 @@
             </a:r>
           </a:p>
           <a:p>
-            <a:pPr marL="0" indent="0">
-              <a:buNone/>
+            <a:pPr>
+              <a:lnSpc>
+                <a:spcPct val="150000"/>
+              </a:lnSpc>
             </a:pPr>
             <a:endParaRPr lang="en-IN" sz="2200" b="1" dirty="0">
               <a:latin typeface="Times New Roman" panose="02020603050405020304" pitchFamily="18" charset="0"/>
@@ -6247,8 +6659,10 @@
             </a:endParaRPr>
           </a:p>
           <a:p>
-            <a:pPr marL="0" indent="0">
-              <a:buNone/>
+            <a:pPr>
+              <a:lnSpc>
+                <a:spcPct val="150000"/>
+              </a:lnSpc>
             </a:pPr>
             <a:r>
               <a:rPr lang="en-IN" sz="2200" b="1" dirty="0">
@@ -6259,6 +6673,13 @@
             </a:r>
           </a:p>
           <a:p>
+            <a:pPr marL="342900" indent="-342900">
+              <a:lnSpc>
+                <a:spcPct val="150000"/>
+              </a:lnSpc>
+              <a:buFont typeface="Arial" panose="020B0604020202020204" pitchFamily="34" charset="0"/>
+              <a:buChar char="•"/>
+            </a:pPr>
             <a:r>
               <a:rPr lang="en-IN" sz="2200" dirty="0">
                 <a:latin typeface="Times New Roman" panose="02020603050405020304" pitchFamily="18" charset="0"/>
@@ -6268,6 +6689,13 @@
             </a:r>
           </a:p>
           <a:p>
+            <a:pPr marL="342900" indent="-342900">
+              <a:lnSpc>
+                <a:spcPct val="150000"/>
+              </a:lnSpc>
+              <a:buFont typeface="Arial" panose="020B0604020202020204" pitchFamily="34" charset="0"/>
+              <a:buChar char="•"/>
+            </a:pPr>
             <a:r>
               <a:rPr lang="en-IN" sz="2200" dirty="0">
                 <a:latin typeface="Times New Roman" panose="02020603050405020304" pitchFamily="18" charset="0"/>
@@ -6277,6 +6705,13 @@
             </a:r>
           </a:p>
           <a:p>
+            <a:pPr marL="342900" indent="-342900">
+              <a:lnSpc>
+                <a:spcPct val="150000"/>
+              </a:lnSpc>
+              <a:buFont typeface="Arial" panose="020B0604020202020204" pitchFamily="34" charset="0"/>
+              <a:buChar char="•"/>
+            </a:pPr>
             <a:r>
               <a:rPr lang="en-IN" sz="2200" dirty="0">
                 <a:latin typeface="Times New Roman" panose="02020603050405020304" pitchFamily="18" charset="0"/>
@@ -6286,6 +6721,13 @@
             </a:r>
           </a:p>
           <a:p>
+            <a:pPr marL="342900" indent="-342900">
+              <a:lnSpc>
+                <a:spcPct val="150000"/>
+              </a:lnSpc>
+              <a:buFont typeface="Arial" panose="020B0604020202020204" pitchFamily="34" charset="0"/>
+              <a:buChar char="•"/>
+            </a:pPr>
             <a:endParaRPr lang="en-IN" sz="2200" dirty="0">
               <a:latin typeface="Times New Roman" panose="02020603050405020304" pitchFamily="18" charset="0"/>
               <a:cs typeface="Times New Roman" panose="02020603050405020304" pitchFamily="18" charset="0"/>
@@ -6373,14 +6815,21 @@
         </p:nvSpPr>
         <p:spPr>
           <a:xfrm>
-            <a:off x="457200" y="1503485"/>
-            <a:ext cx="8229240" cy="4835769"/>
+            <a:off x="105508" y="1881554"/>
+            <a:ext cx="8580932" cy="4193931"/>
           </a:xfrm>
         </p:spPr>
         <p:txBody>
           <a:bodyPr/>
           <a:lstStyle/>
           <a:p>
+            <a:pPr marL="342900" indent="-342900">
+              <a:lnSpc>
+                <a:spcPct val="150000"/>
+              </a:lnSpc>
+              <a:buFont typeface="Arial" panose="020B0604020202020204" pitchFamily="34" charset="0"/>
+              <a:buChar char="•"/>
+            </a:pPr>
             <a:r>
               <a:rPr lang="en-US" sz="2200" b="1" dirty="0">
                 <a:latin typeface="Times New Roman" panose="02020603050405020304" pitchFamily="18" charset="0"/>
@@ -6390,8 +6839,10 @@
             </a:r>
           </a:p>
           <a:p>
-            <a:pPr marL="0" indent="0">
-              <a:buNone/>
+            <a:pPr>
+              <a:lnSpc>
+                <a:spcPct val="150000"/>
+              </a:lnSpc>
             </a:pPr>
             <a:r>
               <a:rPr lang="en-US" sz="2200" dirty="0">
@@ -6402,6 +6853,13 @@
             </a:r>
           </a:p>
           <a:p>
+            <a:pPr marL="342900" indent="-342900">
+              <a:lnSpc>
+                <a:spcPct val="150000"/>
+              </a:lnSpc>
+              <a:buFont typeface="Arial" panose="020B0604020202020204" pitchFamily="34" charset="0"/>
+              <a:buChar char="•"/>
+            </a:pPr>
             <a:r>
               <a:rPr lang="en-US" sz="2200" b="1" dirty="0">
                 <a:latin typeface="Times New Roman" panose="02020603050405020304" pitchFamily="18" charset="0"/>
@@ -6411,8 +6869,10 @@
             </a:r>
           </a:p>
           <a:p>
-            <a:pPr marL="0" indent="0">
-              <a:buNone/>
+            <a:pPr>
+              <a:lnSpc>
+                <a:spcPct val="150000"/>
+              </a:lnSpc>
             </a:pPr>
             <a:r>
               <a:rPr lang="en-US" sz="2200" dirty="0">
@@ -6423,6 +6883,13 @@
             </a:r>
           </a:p>
           <a:p>
+            <a:pPr marL="342900" indent="-342900">
+              <a:lnSpc>
+                <a:spcPct val="150000"/>
+              </a:lnSpc>
+              <a:buFont typeface="Arial" panose="020B0604020202020204" pitchFamily="34" charset="0"/>
+              <a:buChar char="•"/>
+            </a:pPr>
             <a:r>
               <a:rPr lang="en-US" sz="2200" b="1" dirty="0">
                 <a:latin typeface="Times New Roman" panose="02020603050405020304" pitchFamily="18" charset="0"/>
@@ -6432,8 +6899,10 @@
             </a:r>
           </a:p>
           <a:p>
-            <a:pPr marL="0" indent="0">
-              <a:buNone/>
+            <a:pPr>
+              <a:lnSpc>
+                <a:spcPct val="150000"/>
+              </a:lnSpc>
             </a:pPr>
             <a:r>
               <a:rPr lang="en-US" sz="2200" dirty="0">
@@ -6444,6 +6913,13 @@
             </a:r>
           </a:p>
           <a:p>
+            <a:pPr marL="342900" indent="-342900">
+              <a:lnSpc>
+                <a:spcPct val="150000"/>
+              </a:lnSpc>
+              <a:buFont typeface="Arial" panose="020B0604020202020204" pitchFamily="34" charset="0"/>
+              <a:buChar char="•"/>
+            </a:pPr>
             <a:r>
               <a:rPr lang="en-US" sz="2200" b="1" dirty="0">
                 <a:latin typeface="Times New Roman" panose="02020603050405020304" pitchFamily="18" charset="0"/>
@@ -6453,8 +6929,10 @@
             </a:r>
           </a:p>
           <a:p>
-            <a:pPr marL="0" indent="0">
-              <a:buNone/>
+            <a:pPr>
+              <a:lnSpc>
+                <a:spcPct val="150000"/>
+              </a:lnSpc>
             </a:pPr>
             <a:r>
               <a:rPr lang="en-US" sz="2200" dirty="0">
@@ -6465,6 +6943,13 @@
             </a:r>
           </a:p>
           <a:p>
+            <a:pPr marL="342900" indent="-342900">
+              <a:lnSpc>
+                <a:spcPct val="150000"/>
+              </a:lnSpc>
+              <a:buFont typeface="Arial" panose="020B0604020202020204" pitchFamily="34" charset="0"/>
+              <a:buChar char="•"/>
+            </a:pPr>
             <a:r>
               <a:rPr lang="en-US" sz="2200" b="1" dirty="0">
                 <a:latin typeface="Times New Roman" panose="02020603050405020304" pitchFamily="18" charset="0"/>
@@ -6474,8 +6959,10 @@
             </a:r>
           </a:p>
           <a:p>
-            <a:pPr marL="0" indent="0">
-              <a:buNone/>
+            <a:pPr>
+              <a:lnSpc>
+                <a:spcPct val="150000"/>
+              </a:lnSpc>
             </a:pPr>
             <a:r>
               <a:rPr lang="en-US" sz="2200" dirty="0">
@@ -6486,6 +6973,13 @@
             </a:r>
           </a:p>
           <a:p>
+            <a:pPr marL="342900" indent="-342900">
+              <a:lnSpc>
+                <a:spcPct val="150000"/>
+              </a:lnSpc>
+              <a:buFont typeface="Arial" panose="020B0604020202020204" pitchFamily="34" charset="0"/>
+              <a:buChar char="•"/>
+            </a:pPr>
             <a:r>
               <a:rPr lang="en-US" sz="2200" b="1" dirty="0">
                 <a:latin typeface="Times New Roman" panose="02020603050405020304" pitchFamily="18" charset="0"/>
@@ -6495,8 +6989,10 @@
             </a:r>
           </a:p>
           <a:p>
-            <a:pPr marL="0" indent="0">
-              <a:buNone/>
+            <a:pPr>
+              <a:lnSpc>
+                <a:spcPct val="150000"/>
+              </a:lnSpc>
             </a:pPr>
             <a:r>
               <a:rPr lang="en-US" sz="2200" dirty="0">
@@ -6507,6 +7003,13 @@
             </a:r>
           </a:p>
           <a:p>
+            <a:pPr marL="342900" indent="-342900">
+              <a:lnSpc>
+                <a:spcPct val="150000"/>
+              </a:lnSpc>
+              <a:buFont typeface="Arial" panose="020B0604020202020204" pitchFamily="34" charset="0"/>
+              <a:buChar char="•"/>
+            </a:pPr>
             <a:endParaRPr lang="en-IN" sz="2200" dirty="0">
               <a:latin typeface="Times New Roman" panose="02020603050405020304" pitchFamily="18" charset="0"/>
               <a:cs typeface="Times New Roman" panose="02020603050405020304" pitchFamily="18" charset="0"/>
@@ -6720,16 +7223,18 @@
         </p:nvSpPr>
         <p:spPr>
           <a:xfrm>
-            <a:off x="307731" y="1301260"/>
-            <a:ext cx="8229240" cy="4403631"/>
+            <a:off x="123092" y="1591408"/>
+            <a:ext cx="8413879" cy="4343400"/>
           </a:xfrm>
         </p:spPr>
         <p:txBody>
           <a:bodyPr/>
           <a:lstStyle/>
           <a:p>
-            <a:pPr marL="0" indent="0">
-              <a:buNone/>
+            <a:pPr>
+              <a:lnSpc>
+                <a:spcPct val="150000"/>
+              </a:lnSpc>
             </a:pPr>
             <a:r>
               <a:rPr lang="en-IN" sz="2400" b="1" dirty="0">
@@ -6740,8 +7245,12 @@
             </a:r>
           </a:p>
           <a:p>
-            <a:pPr marL="0" indent="0">
-              <a:buNone/>
+            <a:pPr marL="342900" indent="-342900">
+              <a:lnSpc>
+                <a:spcPct val="150000"/>
+              </a:lnSpc>
+              <a:buFont typeface="Arial" panose="020B0604020202020204" pitchFamily="34" charset="0"/>
+              <a:buChar char="•"/>
             </a:pPr>
             <a:endParaRPr lang="en-IN" sz="2400" b="1" dirty="0">
               <a:latin typeface="Times New Roman" panose="02020603050405020304" pitchFamily="18" charset="0"/>
@@ -6749,8 +7258,10 @@
             </a:endParaRPr>
           </a:p>
           <a:p>
-            <a:pPr marL="0" indent="0">
-              <a:buNone/>
+            <a:pPr>
+              <a:lnSpc>
+                <a:spcPct val="150000"/>
+              </a:lnSpc>
             </a:pPr>
             <a:r>
               <a:rPr lang="en-IN" sz="2200" b="1" dirty="0">
@@ -6761,6 +7272,13 @@
             </a:r>
           </a:p>
           <a:p>
+            <a:pPr marL="342900" indent="-342900">
+              <a:lnSpc>
+                <a:spcPct val="150000"/>
+              </a:lnSpc>
+              <a:buFont typeface="Arial" panose="020B0604020202020204" pitchFamily="34" charset="0"/>
+              <a:buChar char="•"/>
+            </a:pPr>
             <a:r>
               <a:rPr lang="en-IN" sz="2200" dirty="0">
                 <a:latin typeface="Times New Roman" panose="02020603050405020304" pitchFamily="18" charset="0"/>
@@ -6770,8 +7288,10 @@
             </a:r>
           </a:p>
           <a:p>
-            <a:pPr marL="0" indent="0">
-              <a:buNone/>
+            <a:pPr>
+              <a:lnSpc>
+                <a:spcPct val="150000"/>
+              </a:lnSpc>
             </a:pPr>
             <a:r>
               <a:rPr lang="en-IN" sz="2200" b="1" dirty="0">
@@ -6782,6 +7302,13 @@
             </a:r>
           </a:p>
           <a:p>
+            <a:pPr marL="342900" indent="-342900">
+              <a:lnSpc>
+                <a:spcPct val="150000"/>
+              </a:lnSpc>
+              <a:buFont typeface="Arial" panose="020B0604020202020204" pitchFamily="34" charset="0"/>
+              <a:buChar char="•"/>
+            </a:pPr>
             <a:r>
               <a:rPr lang="en-IN" sz="2200" dirty="0">
                 <a:latin typeface="Times New Roman" panose="02020603050405020304" pitchFamily="18" charset="0"/>
@@ -6791,6 +7318,13 @@
             </a:r>
           </a:p>
           <a:p>
+            <a:pPr marL="342900" indent="-342900">
+              <a:lnSpc>
+                <a:spcPct val="150000"/>
+              </a:lnSpc>
+              <a:buFont typeface="Arial" panose="020B0604020202020204" pitchFamily="34" charset="0"/>
+              <a:buChar char="•"/>
+            </a:pPr>
             <a:r>
               <a:rPr lang="en-IN" sz="2200" dirty="0">
                 <a:latin typeface="Times New Roman" panose="02020603050405020304" pitchFamily="18" charset="0"/>
@@ -6800,6 +7334,13 @@
             </a:r>
           </a:p>
           <a:p>
+            <a:pPr marL="342900" indent="-342900">
+              <a:lnSpc>
+                <a:spcPct val="150000"/>
+              </a:lnSpc>
+              <a:buFont typeface="Arial" panose="020B0604020202020204" pitchFamily="34" charset="0"/>
+              <a:buChar char="•"/>
+            </a:pPr>
             <a:r>
               <a:rPr lang="en-IN" sz="2200" dirty="0">
                 <a:latin typeface="Times New Roman" panose="02020603050405020304" pitchFamily="18" charset="0"/>
@@ -6809,6 +7350,13 @@
             </a:r>
           </a:p>
           <a:p>
+            <a:pPr marL="342900" indent="-342900">
+              <a:lnSpc>
+                <a:spcPct val="150000"/>
+              </a:lnSpc>
+              <a:buFont typeface="Arial" panose="020B0604020202020204" pitchFamily="34" charset="0"/>
+              <a:buChar char="•"/>
+            </a:pPr>
             <a:r>
               <a:rPr lang="en-IN" sz="2200" dirty="0">
                 <a:latin typeface="Times New Roman" panose="02020603050405020304" pitchFamily="18" charset="0"/>
@@ -6818,6 +7366,13 @@
             </a:r>
           </a:p>
           <a:p>
+            <a:pPr marL="342900" indent="-342900">
+              <a:lnSpc>
+                <a:spcPct val="150000"/>
+              </a:lnSpc>
+              <a:buFont typeface="Arial" panose="020B0604020202020204" pitchFamily="34" charset="0"/>
+              <a:buChar char="•"/>
+            </a:pPr>
             <a:r>
               <a:rPr lang="en-IN" sz="2200" dirty="0">
                 <a:latin typeface="Times New Roman" panose="02020603050405020304" pitchFamily="18" charset="0"/>
@@ -6827,6 +7382,13 @@
             </a:r>
           </a:p>
           <a:p>
+            <a:pPr marL="342900" indent="-342900">
+              <a:lnSpc>
+                <a:spcPct val="150000"/>
+              </a:lnSpc>
+              <a:buFont typeface="Arial" panose="020B0604020202020204" pitchFamily="34" charset="0"/>
+              <a:buChar char="•"/>
+            </a:pPr>
             <a:endParaRPr lang="en-IN" sz="2200" dirty="0">
               <a:latin typeface="Times New Roman" panose="02020603050405020304" pitchFamily="18" charset="0"/>
               <a:cs typeface="Times New Roman" panose="02020603050405020304" pitchFamily="18" charset="0"/>
@@ -6914,16 +7476,18 @@
         </p:nvSpPr>
         <p:spPr>
           <a:xfrm>
-            <a:off x="167053" y="228600"/>
-            <a:ext cx="8229240" cy="5961184"/>
+            <a:off x="114300" y="228600"/>
+            <a:ext cx="8281993" cy="5961184"/>
           </a:xfrm>
         </p:spPr>
         <p:txBody>
           <a:bodyPr/>
           <a:lstStyle/>
           <a:p>
-            <a:pPr marL="0" indent="0">
-              <a:buNone/>
+            <a:pPr>
+              <a:lnSpc>
+                <a:spcPct val="150000"/>
+              </a:lnSpc>
             </a:pPr>
             <a:r>
               <a:rPr lang="en-IN" sz="2200" b="1" dirty="0">
@@ -6934,6 +7498,13 @@
             </a:r>
           </a:p>
           <a:p>
+            <a:pPr marL="342900" indent="-342900">
+              <a:lnSpc>
+                <a:spcPct val="150000"/>
+              </a:lnSpc>
+              <a:buFont typeface="Arial" panose="020B0604020202020204" pitchFamily="34" charset="0"/>
+              <a:buChar char="•"/>
+            </a:pPr>
             <a:r>
               <a:rPr lang="en-IN" sz="2200" dirty="0">
                 <a:latin typeface="Times New Roman" panose="02020603050405020304" pitchFamily="18" charset="0"/>
@@ -6943,6 +7514,13 @@
             </a:r>
           </a:p>
           <a:p>
+            <a:pPr marL="342900" indent="-342900">
+              <a:lnSpc>
+                <a:spcPct val="150000"/>
+              </a:lnSpc>
+              <a:buFont typeface="Arial" panose="020B0604020202020204" pitchFamily="34" charset="0"/>
+              <a:buChar char="•"/>
+            </a:pPr>
             <a:r>
               <a:rPr lang="en-IN" sz="2200" dirty="0">
                 <a:latin typeface="Times New Roman" panose="02020603050405020304" pitchFamily="18" charset="0"/>
@@ -6952,6 +7530,13 @@
             </a:r>
           </a:p>
           <a:p>
+            <a:pPr marL="342900" indent="-342900">
+              <a:lnSpc>
+                <a:spcPct val="150000"/>
+              </a:lnSpc>
+              <a:buFont typeface="Arial" panose="020B0604020202020204" pitchFamily="34" charset="0"/>
+              <a:buChar char="•"/>
+            </a:pPr>
             <a:r>
               <a:rPr lang="en-IN" sz="2200" dirty="0">
                 <a:latin typeface="Times New Roman" panose="02020603050405020304" pitchFamily="18" charset="0"/>
@@ -6961,6 +7546,13 @@
             </a:r>
           </a:p>
           <a:p>
+            <a:pPr marL="342900" indent="-342900">
+              <a:lnSpc>
+                <a:spcPct val="150000"/>
+              </a:lnSpc>
+              <a:buFont typeface="Arial" panose="020B0604020202020204" pitchFamily="34" charset="0"/>
+              <a:buChar char="•"/>
+            </a:pPr>
             <a:r>
               <a:rPr lang="en-IN" sz="2200" dirty="0">
                 <a:latin typeface="Times New Roman" panose="02020603050405020304" pitchFamily="18" charset="0"/>
@@ -6970,14 +7562,23 @@
             </a:r>
           </a:p>
           <a:p>
+            <a:pPr marL="342900" indent="-342900">
+              <a:lnSpc>
+                <a:spcPct val="150000"/>
+              </a:lnSpc>
+              <a:buFont typeface="Arial" panose="020B0604020202020204" pitchFamily="34" charset="0"/>
+              <a:buChar char="•"/>
+            </a:pPr>
             <a:endParaRPr lang="en-IN" sz="2200" dirty="0">
               <a:latin typeface="Times New Roman" panose="02020603050405020304" pitchFamily="18" charset="0"/>
               <a:cs typeface="Times New Roman" panose="02020603050405020304" pitchFamily="18" charset="0"/>
             </a:endParaRPr>
           </a:p>
           <a:p>
-            <a:pPr marL="0" indent="0">
-              <a:buNone/>
+            <a:pPr>
+              <a:lnSpc>
+                <a:spcPct val="150000"/>
+              </a:lnSpc>
             </a:pPr>
             <a:r>
               <a:rPr lang="en-IN" sz="2200" b="1" dirty="0">
@@ -6988,6 +7589,13 @@
             </a:r>
           </a:p>
           <a:p>
+            <a:pPr marL="342900" indent="-342900">
+              <a:lnSpc>
+                <a:spcPct val="150000"/>
+              </a:lnSpc>
+              <a:buFont typeface="Arial" panose="020B0604020202020204" pitchFamily="34" charset="0"/>
+              <a:buChar char="•"/>
+            </a:pPr>
             <a:r>
               <a:rPr lang="en-IN" sz="2200" dirty="0">
                 <a:latin typeface="Times New Roman" panose="02020603050405020304" pitchFamily="18" charset="0"/>
@@ -6997,6 +7605,13 @@
             </a:r>
           </a:p>
           <a:p>
+            <a:pPr marL="342900" indent="-342900">
+              <a:lnSpc>
+                <a:spcPct val="150000"/>
+              </a:lnSpc>
+              <a:buFont typeface="Arial" panose="020B0604020202020204" pitchFamily="34" charset="0"/>
+              <a:buChar char="•"/>
+            </a:pPr>
             <a:endParaRPr lang="en-IN" sz="2200" dirty="0">
               <a:latin typeface="Times New Roman" panose="02020603050405020304" pitchFamily="18" charset="0"/>
               <a:cs typeface="Times New Roman" panose="02020603050405020304" pitchFamily="18" charset="0"/>
@@ -7802,6 +8417,15 @@
 </file>
 
 <file path=customXml/item1.xml><?xml version="1.0" encoding="utf-8"?>
+<?mso-contentType ?>
+<FormTemplates xmlns="http://schemas.microsoft.com/sharepoint/v3/contenttype/forms">
+  <Display>DocumentLibraryForm</Display>
+  <Edit>DocumentLibraryForm</Edit>
+  <New>DocumentLibraryForm</New>
+</FormTemplates>
+</file>
+
+<file path=customXml/item2.xml><?xml version="1.0" encoding="utf-8"?>
 <ct:contentTypeSchema xmlns:ct="http://schemas.microsoft.com/office/2006/metadata/contentType" xmlns:ma="http://schemas.microsoft.com/office/2006/metadata/properties/metaAttributes" ct:_="" ma:_="" ma:contentTypeName="Document" ma:contentTypeID="0x010100096F1BF43DDE004485E7A868D137D60A" ma:contentTypeVersion="0" ma:contentTypeDescription="Create a new document." ma:contentTypeScope="" ma:versionID="47fff7f98a9c49c088ba096c14cf4458">
   <xsd:schema xmlns:xsd="http://www.w3.org/2001/XMLSchema" xmlns:xs="http://www.w3.org/2001/XMLSchema" xmlns:p="http://schemas.microsoft.com/office/2006/metadata/properties" targetNamespace="http://schemas.microsoft.com/office/2006/metadata/properties" ma:root="true" ma:fieldsID="c05e9f2c4932a6a674126b9dde7716ea">
     <xsd:element name="properties">
@@ -7915,15 +8539,6 @@
 </ct:contentTypeSchema>
 </file>
 
-<file path=customXml/item2.xml><?xml version="1.0" encoding="utf-8"?>
-<?mso-contentType ?>
-<FormTemplates xmlns="http://schemas.microsoft.com/sharepoint/v3/contenttype/forms">
-  <Display>DocumentLibraryForm</Display>
-  <Edit>DocumentLibraryForm</Edit>
-  <New>DocumentLibraryForm</New>
-</FormTemplates>
-</file>
-
 <file path=customXml/item3.xml><?xml version="1.0" encoding="utf-8"?>
 <p:properties xmlns:p="http://schemas.microsoft.com/office/2006/metadata/properties" xmlns:xsi="http://www.w3.org/2001/XMLSchema-instance" xmlns:pc="http://schemas.microsoft.com/office/infopath/2007/PartnerControls">
   <documentManagement/>
@@ -7931,6 +8546,14 @@
 </file>
 
 <file path=customXml/itemProps1.xml><?xml version="1.0" encoding="utf-8"?>
+<ds:datastoreItem xmlns:ds="http://schemas.openxmlformats.org/officeDocument/2006/customXml" ds:itemID="{737ED6F0-5E4C-4CD0-9B68-9C53F925A6F7}">
+  <ds:schemaRefs>
+    <ds:schemaRef ds:uri="http://schemas.microsoft.com/sharepoint/v3/contenttype/forms"/>
+  </ds:schemaRefs>
+</ds:datastoreItem>
+</file>
+
+<file path=customXml/itemProps2.xml><?xml version="1.0" encoding="utf-8"?>
 <ds:datastoreItem xmlns:ds="http://schemas.openxmlformats.org/officeDocument/2006/customXml" ds:itemID="{491DF113-39A2-46D5-BFDA-E63300A9ECAB}">
   <ds:schemaRefs>
     <ds:schemaRef ds:uri="http://schemas.microsoft.com/office/2006/metadata/contentType"/>
@@ -7942,14 +8565,6 @@
     <ds:schemaRef ds:uri="http://purl.org/dc/terms/"/>
     <ds:schemaRef ds:uri="http://schemas.microsoft.com/internal/obd"/>
     <ds:schemaRef ds:uri="http://schemas.microsoft.com/office/infopath/2007/PartnerControls"/>
-  </ds:schemaRefs>
-</ds:datastoreItem>
-</file>
-
-<file path=customXml/itemProps2.xml><?xml version="1.0" encoding="utf-8"?>
-<ds:datastoreItem xmlns:ds="http://schemas.openxmlformats.org/officeDocument/2006/customXml" ds:itemID="{737ED6F0-5E4C-4CD0-9B68-9C53F925A6F7}">
-  <ds:schemaRefs>
-    <ds:schemaRef ds:uri="http://schemas.microsoft.com/sharepoint/v3/contenttype/forms"/>
   </ds:schemaRefs>
 </ds:datastoreItem>
 </file>
